--- a/mon/toan/slide/lop11/Slide_TOAN11_Bai2_T4-5.pptx
+++ b/mon/toan/slide/lop11/Slide_TOAN11_Bai2_T4-5.pptx
@@ -3339,7 +3339,7 @@
                 </a:solidFill>
                 <a:latin typeface="Calibri"/>
               </a:rPr>
-              <a:t>GV soạn: Trương Tử Trang – Trường THPT Vĩnh Thạnh</a:t>
+              <a:t>GV soạn: TTT – Trường THPT</a:t>
             </a:r>
           </a:p>
         </p:txBody>
@@ -8492,50 +8492,6 @@
       <p:grpSpPr/>
       <p:sp>
         <p:nvSpPr>
-          <p:cNvPr id="2" name="Rectangle 1"/>
-          <p:cNvSpPr/>
-          <p:nvPr/>
-        </p:nvSpPr>
-        <p:spPr>
-          <a:xfrm>
-            <a:off x="457200" y="384048"/>
-            <a:ext cx="109728" cy="658368"/>
-          </a:xfrm>
-          <a:prstGeom prst="rect">
-            <a:avLst/>
-          </a:prstGeom>
-          <a:solidFill>
-            <a:srgbClr val="1E40AF"/>
-          </a:solidFill>
-          <a:ln>
-            <a:noFill/>
-          </a:ln>
-          <a:effectLst/>
-        </p:spPr>
-        <p:style>
-          <a:lnRef idx="1">
-            <a:schemeClr val="accent1"/>
-          </a:lnRef>
-          <a:fillRef idx="3">
-            <a:schemeClr val="accent1"/>
-          </a:fillRef>
-          <a:effectRef idx="2">
-            <a:schemeClr val="accent1"/>
-          </a:effectRef>
-          <a:fontRef idx="minor">
-            <a:schemeClr val="lt1"/>
-          </a:fontRef>
-        </p:style>
-        <p:txBody>
-          <a:bodyPr rtlCol="0" anchor="ctr"/>
-          <a:lstStyle/>
-          <a:p>
-            <a:pPr algn="ctr"/>
-          </a:p>
-        </p:txBody>
-      </p:sp>
-      <p:sp>
-        <p:nvSpPr>
           <p:cNvPr id="3" name="TextBox 2"/>
           <p:cNvSpPr txBox="1"/>
           <p:nvPr/>
@@ -8647,30 +8603,1565 @@
           </a:p>
         </p:txBody>
       </p:sp>
-      <p:pic>
-        <p:nvPicPr>
-          <p:cNvPr id="6" name="Picture 5" descr="rId11.png"/>
-          <p:cNvPicPr>
-            <a:picLocks noChangeAspect="1"/>
-          </p:cNvPicPr>
+      <p:cxnSp>
+        <p:nvCxnSpPr>
+          <p:cNvPr id="6" name="Connector 5"/>
+          <p:cNvCxnSpPr/>
           <p:nvPr/>
-        </p:nvPicPr>
-        <p:blipFill>
-          <a:blip r:embed="rId2"/>
-          <a:stretch>
-            <a:fillRect/>
-          </a:stretch>
-        </p:blipFill>
+        </p:nvCxnSpPr>
+        <p:spPr>
+          <a:xfrm flipH="1" flipV="1">
+            <a:off x="4338888" y="2670962"/>
+            <a:ext cx="1688379" cy="1283818"/>
+          </a:xfrm>
+          <a:prstGeom prst="line">
+            <a:avLst/>
+          </a:prstGeom>
+          <a:ln w="44450">
+            <a:solidFill>
+              <a:srgbClr val="548235"/>
+            </a:solidFill>
+          </a:ln>
+        </p:spPr>
+        <p:style>
+          <a:lnRef idx="2">
+            <a:schemeClr val="accent1"/>
+          </a:lnRef>
+          <a:fillRef idx="0">
+            <a:schemeClr val="accent1"/>
+          </a:fillRef>
+          <a:effectRef idx="1">
+            <a:schemeClr val="accent1"/>
+          </a:effectRef>
+          <a:fontRef idx="minor">
+            <a:schemeClr val="tx1"/>
+          </a:fontRef>
+        </p:style>
+      </p:cxnSp>
+      <p:cxnSp>
+        <p:nvCxnSpPr>
+          <p:cNvPr id="7" name="Connector 6"/>
+          <p:cNvCxnSpPr/>
+          <p:nvPr/>
+        </p:nvCxnSpPr>
+        <p:spPr>
+          <a:xfrm flipH="1" flipV="1">
+            <a:off x="2850629" y="2043450"/>
+            <a:ext cx="1488259" cy="627512"/>
+          </a:xfrm>
+          <a:prstGeom prst="line">
+            <a:avLst/>
+          </a:prstGeom>
+          <a:ln w="15875">
+            <a:solidFill>
+              <a:srgbClr val="548235"/>
+            </a:solidFill>
+          </a:ln>
+        </p:spPr>
+        <p:style>
+          <a:lnRef idx="2">
+            <a:schemeClr val="accent1"/>
+          </a:lnRef>
+          <a:fillRef idx="0">
+            <a:schemeClr val="accent1"/>
+          </a:fillRef>
+          <a:effectRef idx="1">
+            <a:schemeClr val="accent1"/>
+          </a:effectRef>
+          <a:fontRef idx="minor">
+            <a:schemeClr val="tx1"/>
+          </a:fontRef>
+        </p:style>
+      </p:cxnSp>
+      <p:sp>
+        <p:nvSpPr>
+          <p:cNvPr id="8" name="Rounded Rectangle 7"/>
+          <p:cNvSpPr/>
+          <p:nvPr/>
+        </p:nvSpPr>
         <p:spPr>
           <a:xfrm>
-            <a:off x="2452400" y="1417320"/>
-            <a:ext cx="7256720" cy="4800600"/>
+            <a:off x="762012" y="1767138"/>
+            <a:ext cx="2088617" cy="552622"/>
           </a:xfrm>
-          <a:prstGeom prst="rect">
+          <a:prstGeom prst="roundRect">
+            <a:avLst>
+              <a:gd name="adj" fmla="val 50000"/>
+            </a:avLst>
+          </a:prstGeom>
+          <a:solidFill>
+            <a:srgbClr val="EDF5E8"/>
+          </a:solidFill>
+          <a:ln w="15875">
+            <a:solidFill>
+              <a:srgbClr val="548235"/>
+            </a:solidFill>
+          </a:ln>
+          <a:effectLst/>
+        </p:spPr>
+        <p:style>
+          <a:lnRef idx="1">
+            <a:schemeClr val="accent1"/>
+          </a:lnRef>
+          <a:fillRef idx="3">
+            <a:schemeClr val="accent1"/>
+          </a:fillRef>
+          <a:effectRef idx="2">
+            <a:schemeClr val="accent1"/>
+          </a:effectRef>
+          <a:fontRef idx="minor">
+            <a:schemeClr val="lt1"/>
+          </a:fontRef>
+        </p:style>
+        <p:txBody>
+          <a:bodyPr rtlCol="0" anchor="ctr" wrap="none" lIns="64000" rIns="64000" tIns="25400" bIns="25400"/>
+          <a:lstStyle/>
+          <a:p>
+            <a:pPr algn="ctr"/>
+            <a:r>
+              <a:rPr sz="1300" b="0">
+                <a:solidFill>
+                  <a:srgbClr val="000000"/>
+                </a:solidFill>
+                <a:latin typeface="Calibri"/>
+              </a:rPr>
+              <a:t>sin(a±b) = sinacosb ±</a:t>
+            </a:r>
+          </a:p>
+          <a:p>
+            <a:pPr algn="ctr"/>
+            <a:r>
+              <a:rPr sz="1300" b="0">
+                <a:solidFill>
+                  <a:srgbClr val="000000"/>
+                </a:solidFill>
+                <a:latin typeface="Calibri"/>
+              </a:rPr>
+              <a:t>cosasinb</a:t>
+            </a:r>
+          </a:p>
+        </p:txBody>
+      </p:sp>
+      <p:cxnSp>
+        <p:nvCxnSpPr>
+          <p:cNvPr id="9" name="Connector 8"/>
+          <p:cNvCxnSpPr/>
+          <p:nvPr/>
+        </p:nvCxnSpPr>
+        <p:spPr>
+          <a:xfrm flipH="1">
+            <a:off x="2850629" y="2670962"/>
+            <a:ext cx="1488259" cy="0"/>
+          </a:xfrm>
+          <a:prstGeom prst="line">
             <a:avLst/>
           </a:prstGeom>
+          <a:ln w="15875">
+            <a:solidFill>
+              <a:srgbClr val="548235"/>
+            </a:solidFill>
+          </a:ln>
         </p:spPr>
-      </p:pic>
+        <p:style>
+          <a:lnRef idx="2">
+            <a:schemeClr val="accent1"/>
+          </a:lnRef>
+          <a:fillRef idx="0">
+            <a:schemeClr val="accent1"/>
+          </a:fillRef>
+          <a:effectRef idx="1">
+            <a:schemeClr val="accent1"/>
+          </a:effectRef>
+          <a:fontRef idx="minor">
+            <a:schemeClr val="tx1"/>
+          </a:fontRef>
+        </p:style>
+      </p:cxnSp>
+      <p:sp>
+        <p:nvSpPr>
+          <p:cNvPr id="10" name="Rounded Rectangle 9"/>
+          <p:cNvSpPr/>
+          <p:nvPr/>
+        </p:nvSpPr>
+        <p:spPr>
+          <a:xfrm>
+            <a:off x="762012" y="2394651"/>
+            <a:ext cx="2088617" cy="552622"/>
+          </a:xfrm>
+          <a:prstGeom prst="roundRect">
+            <a:avLst>
+              <a:gd name="adj" fmla="val 50000"/>
+            </a:avLst>
+          </a:prstGeom>
+          <a:solidFill>
+            <a:srgbClr val="EDF5E8"/>
+          </a:solidFill>
+          <a:ln w="15875">
+            <a:solidFill>
+              <a:srgbClr val="548235"/>
+            </a:solidFill>
+          </a:ln>
+          <a:effectLst/>
+        </p:spPr>
+        <p:style>
+          <a:lnRef idx="1">
+            <a:schemeClr val="accent1"/>
+          </a:lnRef>
+          <a:fillRef idx="3">
+            <a:schemeClr val="accent1"/>
+          </a:fillRef>
+          <a:effectRef idx="2">
+            <a:schemeClr val="accent1"/>
+          </a:effectRef>
+          <a:fontRef idx="minor">
+            <a:schemeClr val="lt1"/>
+          </a:fontRef>
+        </p:style>
+        <p:txBody>
+          <a:bodyPr rtlCol="0" anchor="ctr" wrap="none" lIns="64000" rIns="64000" tIns="25400" bIns="25400"/>
+          <a:lstStyle/>
+          <a:p>
+            <a:pPr algn="ctr"/>
+            <a:r>
+              <a:rPr sz="1300" b="0">
+                <a:solidFill>
+                  <a:srgbClr val="000000"/>
+                </a:solidFill>
+                <a:latin typeface="Calibri"/>
+              </a:rPr>
+              <a:t>cos(a±b) = cosacosb ∓</a:t>
+            </a:r>
+          </a:p>
+          <a:p>
+            <a:pPr algn="ctr"/>
+            <a:r>
+              <a:rPr sz="1300" b="0">
+                <a:solidFill>
+                  <a:srgbClr val="000000"/>
+                </a:solidFill>
+                <a:latin typeface="Calibri"/>
+              </a:rPr>
+              <a:t>sinasinb</a:t>
+            </a:r>
+          </a:p>
+        </p:txBody>
+      </p:sp>
+      <p:cxnSp>
+        <p:nvCxnSpPr>
+          <p:cNvPr id="11" name="Connector 10"/>
+          <p:cNvCxnSpPr/>
+          <p:nvPr/>
+        </p:nvCxnSpPr>
+        <p:spPr>
+          <a:xfrm flipH="1">
+            <a:off x="2979407" y="2670962"/>
+            <a:ext cx="1359481" cy="627512"/>
+          </a:xfrm>
+          <a:prstGeom prst="line">
+            <a:avLst/>
+          </a:prstGeom>
+          <a:ln w="15875">
+            <a:solidFill>
+              <a:srgbClr val="548235"/>
+            </a:solidFill>
+          </a:ln>
+        </p:spPr>
+        <p:style>
+          <a:lnRef idx="2">
+            <a:schemeClr val="accent1"/>
+          </a:lnRef>
+          <a:fillRef idx="0">
+            <a:schemeClr val="accent1"/>
+          </a:fillRef>
+          <a:effectRef idx="1">
+            <a:schemeClr val="accent1"/>
+          </a:effectRef>
+          <a:fontRef idx="minor">
+            <a:schemeClr val="tx1"/>
+          </a:fontRef>
+        </p:style>
+      </p:cxnSp>
+      <p:sp>
+        <p:nvSpPr>
+          <p:cNvPr id="12" name="Rounded Rectangle 11"/>
+          <p:cNvSpPr/>
+          <p:nvPr/>
+        </p:nvSpPr>
+        <p:spPr>
+          <a:xfrm>
+            <a:off x="633234" y="3022163"/>
+            <a:ext cx="2346173" cy="552622"/>
+          </a:xfrm>
+          <a:prstGeom prst="roundRect">
+            <a:avLst>
+              <a:gd name="adj" fmla="val 50000"/>
+            </a:avLst>
+          </a:prstGeom>
+          <a:solidFill>
+            <a:srgbClr val="EDF5E8"/>
+          </a:solidFill>
+          <a:ln w="15875">
+            <a:solidFill>
+              <a:srgbClr val="548235"/>
+            </a:solidFill>
+          </a:ln>
+          <a:effectLst/>
+        </p:spPr>
+        <p:style>
+          <a:lnRef idx="1">
+            <a:schemeClr val="accent1"/>
+          </a:lnRef>
+          <a:fillRef idx="3">
+            <a:schemeClr val="accent1"/>
+          </a:fillRef>
+          <a:effectRef idx="2">
+            <a:schemeClr val="accent1"/>
+          </a:effectRef>
+          <a:fontRef idx="minor">
+            <a:schemeClr val="lt1"/>
+          </a:fontRef>
+        </p:style>
+        <p:txBody>
+          <a:bodyPr rtlCol="0" anchor="ctr" wrap="none" lIns="64000" rIns="64000" tIns="25400" bIns="25400"/>
+          <a:lstStyle/>
+          <a:p>
+            <a:pPr algn="ctr"/>
+            <a:r>
+              <a:rPr sz="1300" b="0">
+                <a:solidFill>
+                  <a:srgbClr val="000000"/>
+                </a:solidFill>
+                <a:latin typeface="Calibri"/>
+              </a:rPr>
+              <a:t>tan(a±b) =</a:t>
+            </a:r>
+          </a:p>
+          <a:p>
+            <a:pPr algn="ctr"/>
+            <a:r>
+              <a:rPr sz="1300" b="0">
+                <a:solidFill>
+                  <a:srgbClr val="000000"/>
+                </a:solidFill>
+                <a:latin typeface="Calibri"/>
+              </a:rPr>
+              <a:t>(tana±tanb)/(1∓tanatanb)</a:t>
+            </a:r>
+          </a:p>
+        </p:txBody>
+      </p:sp>
+      <p:sp>
+        <p:nvSpPr>
+          <p:cNvPr id="13" name="Oval 12"/>
+          <p:cNvSpPr/>
+          <p:nvPr/>
+        </p:nvSpPr>
+        <p:spPr>
+          <a:xfrm>
+            <a:off x="3225238" y="2427575"/>
+            <a:ext cx="2227301" cy="486773"/>
+          </a:xfrm>
+          <a:prstGeom prst="ellipse">
+            <a:avLst/>
+          </a:prstGeom>
+          <a:solidFill>
+            <a:srgbClr val="E2EFDA"/>
+          </a:solidFill>
+          <a:ln w="31750">
+            <a:solidFill>
+              <a:srgbClr val="375623"/>
+            </a:solidFill>
+          </a:ln>
+          <a:effectLst/>
+        </p:spPr>
+        <p:style>
+          <a:lnRef idx="1">
+            <a:schemeClr val="accent1"/>
+          </a:lnRef>
+          <a:fillRef idx="3">
+            <a:schemeClr val="accent1"/>
+          </a:fillRef>
+          <a:effectRef idx="2">
+            <a:schemeClr val="accent1"/>
+          </a:effectRef>
+          <a:fontRef idx="minor">
+            <a:schemeClr val="lt1"/>
+          </a:fontRef>
+        </p:style>
+        <p:txBody>
+          <a:bodyPr rtlCol="0" anchor="ctr" wrap="none" lIns="64000" rIns="64000" tIns="25400" bIns="25400"/>
+          <a:lstStyle/>
+          <a:p>
+            <a:pPr algn="ctr"/>
+            <a:r>
+              <a:rPr sz="1500" b="1">
+                <a:solidFill>
+                  <a:srgbClr val="000000"/>
+                </a:solidFill>
+                <a:latin typeface="Calibri"/>
+              </a:rPr>
+              <a:t>Công thức cộng</a:t>
+            </a:r>
+          </a:p>
+        </p:txBody>
+      </p:sp>
+      <p:cxnSp>
+        <p:nvCxnSpPr>
+          <p:cNvPr id="14" name="Connector 13"/>
+          <p:cNvCxnSpPr/>
+          <p:nvPr/>
+        </p:nvCxnSpPr>
+        <p:spPr>
+          <a:xfrm flipV="1">
+            <a:off x="6027267" y="2670962"/>
+            <a:ext cx="1688379" cy="1283818"/>
+          </a:xfrm>
+          <a:prstGeom prst="line">
+            <a:avLst/>
+          </a:prstGeom>
+          <a:ln w="44450">
+            <a:solidFill>
+              <a:srgbClr val="BF8F00"/>
+            </a:solidFill>
+          </a:ln>
+        </p:spPr>
+        <p:style>
+          <a:lnRef idx="2">
+            <a:schemeClr val="accent1"/>
+          </a:lnRef>
+          <a:fillRef idx="0">
+            <a:schemeClr val="accent1"/>
+          </a:fillRef>
+          <a:effectRef idx="1">
+            <a:schemeClr val="accent1"/>
+          </a:effectRef>
+          <a:fontRef idx="minor">
+            <a:schemeClr val="tx1"/>
+          </a:fontRef>
+        </p:style>
+      </p:cxnSp>
+      <p:cxnSp>
+        <p:nvCxnSpPr>
+          <p:cNvPr id="15" name="Connector 14"/>
+          <p:cNvCxnSpPr/>
+          <p:nvPr/>
+        </p:nvCxnSpPr>
+        <p:spPr>
+          <a:xfrm flipV="1">
+            <a:off x="7715646" y="2144161"/>
+            <a:ext cx="1659963" cy="526801"/>
+          </a:xfrm>
+          <a:prstGeom prst="line">
+            <a:avLst/>
+          </a:prstGeom>
+          <a:ln w="15875">
+            <a:solidFill>
+              <a:srgbClr val="BF8F00"/>
+            </a:solidFill>
+          </a:ln>
+        </p:spPr>
+        <p:style>
+          <a:lnRef idx="2">
+            <a:schemeClr val="accent1"/>
+          </a:lnRef>
+          <a:fillRef idx="0">
+            <a:schemeClr val="accent1"/>
+          </a:fillRef>
+          <a:effectRef idx="1">
+            <a:schemeClr val="accent1"/>
+          </a:effectRef>
+          <a:fontRef idx="minor">
+            <a:schemeClr val="tx1"/>
+          </a:fontRef>
+        </p:style>
+      </p:cxnSp>
+      <p:sp>
+        <p:nvSpPr>
+          <p:cNvPr id="16" name="Rounded Rectangle 15"/>
+          <p:cNvSpPr/>
+          <p:nvPr/>
+        </p:nvSpPr>
+        <p:spPr>
+          <a:xfrm>
+            <a:off x="9375609" y="1968560"/>
+            <a:ext cx="1745209" cy="351200"/>
+          </a:xfrm>
+          <a:prstGeom prst="roundRect">
+            <a:avLst>
+              <a:gd name="adj" fmla="val 50000"/>
+            </a:avLst>
+          </a:prstGeom>
+          <a:solidFill>
+            <a:srgbClr val="FFF8E1"/>
+          </a:solidFill>
+          <a:ln w="15875">
+            <a:solidFill>
+              <a:srgbClr val="BF8F00"/>
+            </a:solidFill>
+          </a:ln>
+          <a:effectLst/>
+        </p:spPr>
+        <p:style>
+          <a:lnRef idx="1">
+            <a:schemeClr val="accent1"/>
+          </a:lnRef>
+          <a:fillRef idx="3">
+            <a:schemeClr val="accent1"/>
+          </a:fillRef>
+          <a:effectRef idx="2">
+            <a:schemeClr val="accent1"/>
+          </a:effectRef>
+          <a:fontRef idx="minor">
+            <a:schemeClr val="lt1"/>
+          </a:fontRef>
+        </p:style>
+        <p:txBody>
+          <a:bodyPr rtlCol="0" anchor="ctr" wrap="none" lIns="64000" rIns="64000" tIns="25400" bIns="25400"/>
+          <a:lstStyle/>
+          <a:p>
+            <a:pPr algn="ctr"/>
+            <a:r>
+              <a:rPr sz="1300" b="0">
+                <a:solidFill>
+                  <a:srgbClr val="000000"/>
+                </a:solidFill>
+                <a:latin typeface="Calibri"/>
+              </a:rPr>
+              <a:t>sin2a = 2sinacosa</a:t>
+            </a:r>
+          </a:p>
+        </p:txBody>
+      </p:sp>
+      <p:cxnSp>
+        <p:nvCxnSpPr>
+          <p:cNvPr id="17" name="Connector 16"/>
+          <p:cNvCxnSpPr/>
+          <p:nvPr/>
+        </p:nvCxnSpPr>
+        <p:spPr>
+          <a:xfrm>
+            <a:off x="7715646" y="2670962"/>
+            <a:ext cx="1488259" cy="0"/>
+          </a:xfrm>
+          <a:prstGeom prst="line">
+            <a:avLst/>
+          </a:prstGeom>
+          <a:ln w="15875">
+            <a:solidFill>
+              <a:srgbClr val="BF8F00"/>
+            </a:solidFill>
+          </a:ln>
+        </p:spPr>
+        <p:style>
+          <a:lnRef idx="2">
+            <a:schemeClr val="accent1"/>
+          </a:lnRef>
+          <a:fillRef idx="0">
+            <a:schemeClr val="accent1"/>
+          </a:fillRef>
+          <a:effectRef idx="1">
+            <a:schemeClr val="accent1"/>
+          </a:effectRef>
+          <a:fontRef idx="minor">
+            <a:schemeClr val="tx1"/>
+          </a:fontRef>
+        </p:style>
+      </p:cxnSp>
+      <p:sp>
+        <p:nvSpPr>
+          <p:cNvPr id="18" name="Rounded Rectangle 17"/>
+          <p:cNvSpPr/>
+          <p:nvPr/>
+        </p:nvSpPr>
+        <p:spPr>
+          <a:xfrm>
+            <a:off x="9203905" y="2394651"/>
+            <a:ext cx="2088617" cy="552622"/>
+          </a:xfrm>
+          <a:prstGeom prst="roundRect">
+            <a:avLst>
+              <a:gd name="adj" fmla="val 50000"/>
+            </a:avLst>
+          </a:prstGeom>
+          <a:solidFill>
+            <a:srgbClr val="FFF8E1"/>
+          </a:solidFill>
+          <a:ln w="15875">
+            <a:solidFill>
+              <a:srgbClr val="BF8F00"/>
+            </a:solidFill>
+          </a:ln>
+          <a:effectLst/>
+        </p:spPr>
+        <p:style>
+          <a:lnRef idx="1">
+            <a:schemeClr val="accent1"/>
+          </a:lnRef>
+          <a:fillRef idx="3">
+            <a:schemeClr val="accent1"/>
+          </a:fillRef>
+          <a:effectRef idx="2">
+            <a:schemeClr val="accent1"/>
+          </a:effectRef>
+          <a:fontRef idx="minor">
+            <a:schemeClr val="lt1"/>
+          </a:fontRef>
+        </p:style>
+        <p:txBody>
+          <a:bodyPr rtlCol="0" anchor="ctr" wrap="none" lIns="64000" rIns="64000" tIns="25400" bIns="25400"/>
+          <a:lstStyle/>
+          <a:p>
+            <a:pPr algn="ctr"/>
+            <a:r>
+              <a:rPr sz="1300" b="0">
+                <a:solidFill>
+                  <a:srgbClr val="000000"/>
+                </a:solidFill>
+                <a:latin typeface="Calibri"/>
+              </a:rPr>
+              <a:t>cos2a = cos²a−sin²a =</a:t>
+            </a:r>
+          </a:p>
+          <a:p>
+            <a:pPr algn="ctr"/>
+            <a:r>
+              <a:rPr sz="1300" b="0">
+                <a:solidFill>
+                  <a:srgbClr val="000000"/>
+                </a:solidFill>
+                <a:latin typeface="Calibri"/>
+              </a:rPr>
+              <a:t>2cos²a−1 = 1−2sin²a</a:t>
+            </a:r>
+          </a:p>
+        </p:txBody>
+      </p:sp>
+      <p:cxnSp>
+        <p:nvCxnSpPr>
+          <p:cNvPr id="19" name="Connector 18"/>
+          <p:cNvCxnSpPr/>
+          <p:nvPr/>
+        </p:nvCxnSpPr>
+        <p:spPr>
+          <a:xfrm>
+            <a:off x="7715646" y="2670962"/>
+            <a:ext cx="1402407" cy="526801"/>
+          </a:xfrm>
+          <a:prstGeom prst="line">
+            <a:avLst/>
+          </a:prstGeom>
+          <a:ln w="15875">
+            <a:solidFill>
+              <a:srgbClr val="BF8F00"/>
+            </a:solidFill>
+          </a:ln>
+        </p:spPr>
+        <p:style>
+          <a:lnRef idx="2">
+            <a:schemeClr val="accent1"/>
+          </a:lnRef>
+          <a:fillRef idx="0">
+            <a:schemeClr val="accent1"/>
+          </a:fillRef>
+          <a:effectRef idx="1">
+            <a:schemeClr val="accent1"/>
+          </a:effectRef>
+          <a:fontRef idx="minor">
+            <a:schemeClr val="tx1"/>
+          </a:fontRef>
+        </p:style>
+      </p:cxnSp>
+      <p:sp>
+        <p:nvSpPr>
+          <p:cNvPr id="20" name="Rounded Rectangle 19"/>
+          <p:cNvSpPr/>
+          <p:nvPr/>
+        </p:nvSpPr>
+        <p:spPr>
+          <a:xfrm>
+            <a:off x="9118053" y="3022163"/>
+            <a:ext cx="2260321" cy="351200"/>
+          </a:xfrm>
+          <a:prstGeom prst="roundRect">
+            <a:avLst>
+              <a:gd name="adj" fmla="val 50000"/>
+            </a:avLst>
+          </a:prstGeom>
+          <a:solidFill>
+            <a:srgbClr val="FFF8E1"/>
+          </a:solidFill>
+          <a:ln w="15875">
+            <a:solidFill>
+              <a:srgbClr val="BF8F00"/>
+            </a:solidFill>
+          </a:ln>
+          <a:effectLst/>
+        </p:spPr>
+        <p:style>
+          <a:lnRef idx="1">
+            <a:schemeClr val="accent1"/>
+          </a:lnRef>
+          <a:fillRef idx="3">
+            <a:schemeClr val="accent1"/>
+          </a:fillRef>
+          <a:effectRef idx="2">
+            <a:schemeClr val="accent1"/>
+          </a:effectRef>
+          <a:fontRef idx="minor">
+            <a:schemeClr val="lt1"/>
+          </a:fontRef>
+        </p:style>
+        <p:txBody>
+          <a:bodyPr rtlCol="0" anchor="ctr" wrap="none" lIns="64000" rIns="64000" tIns="25400" bIns="25400"/>
+          <a:lstStyle/>
+          <a:p>
+            <a:pPr algn="ctr"/>
+            <a:r>
+              <a:rPr sz="1300" b="0">
+                <a:solidFill>
+                  <a:srgbClr val="000000"/>
+                </a:solidFill>
+                <a:latin typeface="Calibri"/>
+              </a:rPr>
+              <a:t>tan2a = 2tana/(1−tan²a)</a:t>
+            </a:r>
+          </a:p>
+        </p:txBody>
+      </p:sp>
+      <p:sp>
+        <p:nvSpPr>
+          <p:cNvPr id="21" name="Oval 20"/>
+          <p:cNvSpPr/>
+          <p:nvPr/>
+        </p:nvSpPr>
+        <p:spPr>
+          <a:xfrm>
+            <a:off x="6601995" y="2259078"/>
+            <a:ext cx="2227301" cy="823767"/>
+          </a:xfrm>
+          <a:prstGeom prst="ellipse">
+            <a:avLst/>
+          </a:prstGeom>
+          <a:solidFill>
+            <a:srgbClr val="FFF2CC"/>
+          </a:solidFill>
+          <a:ln w="31750">
+            <a:solidFill>
+              <a:srgbClr val="BF8F00"/>
+            </a:solidFill>
+          </a:ln>
+          <a:effectLst/>
+        </p:spPr>
+        <p:style>
+          <a:lnRef idx="1">
+            <a:schemeClr val="accent1"/>
+          </a:lnRef>
+          <a:fillRef idx="3">
+            <a:schemeClr val="accent1"/>
+          </a:fillRef>
+          <a:effectRef idx="2">
+            <a:schemeClr val="accent1"/>
+          </a:effectRef>
+          <a:fontRef idx="minor">
+            <a:schemeClr val="lt1"/>
+          </a:fontRef>
+        </p:style>
+        <p:txBody>
+          <a:bodyPr rtlCol="0" anchor="ctr" wrap="none" lIns="64000" rIns="64000" tIns="25400" bIns="25400"/>
+          <a:lstStyle/>
+          <a:p>
+            <a:pPr algn="ctr"/>
+            <a:r>
+              <a:rPr sz="1500" b="1">
+                <a:solidFill>
+                  <a:srgbClr val="000000"/>
+                </a:solidFill>
+                <a:latin typeface="Calibri"/>
+              </a:rPr>
+              <a:t>Công thức nhân</a:t>
+            </a:r>
+          </a:p>
+          <a:p>
+            <a:pPr algn="ctr"/>
+            <a:r>
+              <a:rPr sz="1500" b="1">
+                <a:solidFill>
+                  <a:srgbClr val="000000"/>
+                </a:solidFill>
+                <a:latin typeface="Calibri"/>
+              </a:rPr>
+              <a:t>đôi</a:t>
+            </a:r>
+          </a:p>
+        </p:txBody>
+      </p:sp>
+      <p:cxnSp>
+        <p:nvCxnSpPr>
+          <p:cNvPr id="22" name="Connector 21"/>
+          <p:cNvCxnSpPr/>
+          <p:nvPr/>
+        </p:nvCxnSpPr>
+        <p:spPr>
+          <a:xfrm flipH="1">
+            <a:off x="4338888" y="3954780"/>
+            <a:ext cx="1688379" cy="1283817"/>
+          </a:xfrm>
+          <a:prstGeom prst="line">
+            <a:avLst/>
+          </a:prstGeom>
+          <a:ln w="44450">
+            <a:solidFill>
+              <a:srgbClr val="2F5597"/>
+            </a:solidFill>
+          </a:ln>
+        </p:spPr>
+        <p:style>
+          <a:lnRef idx="2">
+            <a:schemeClr val="accent1"/>
+          </a:lnRef>
+          <a:fillRef idx="0">
+            <a:schemeClr val="accent1"/>
+          </a:fillRef>
+          <a:effectRef idx="1">
+            <a:schemeClr val="accent1"/>
+          </a:effectRef>
+          <a:fontRef idx="minor">
+            <a:schemeClr val="tx1"/>
+          </a:fontRef>
+        </p:style>
+      </p:cxnSp>
+      <p:cxnSp>
+        <p:nvCxnSpPr>
+          <p:cNvPr id="23" name="Connector 22"/>
+          <p:cNvCxnSpPr/>
+          <p:nvPr/>
+        </p:nvCxnSpPr>
+        <p:spPr>
+          <a:xfrm flipH="1" flipV="1">
+            <a:off x="2764777" y="5025552"/>
+            <a:ext cx="1574111" cy="213045"/>
+          </a:xfrm>
+          <a:prstGeom prst="line">
+            <a:avLst/>
+          </a:prstGeom>
+          <a:ln w="15875">
+            <a:solidFill>
+              <a:srgbClr val="2F5597"/>
+            </a:solidFill>
+          </a:ln>
+        </p:spPr>
+        <p:style>
+          <a:lnRef idx="2">
+            <a:schemeClr val="accent1"/>
+          </a:lnRef>
+          <a:fillRef idx="0">
+            <a:schemeClr val="accent1"/>
+          </a:fillRef>
+          <a:effectRef idx="1">
+            <a:schemeClr val="accent1"/>
+          </a:effectRef>
+          <a:fontRef idx="minor">
+            <a:schemeClr val="tx1"/>
+          </a:fontRef>
+        </p:style>
+      </p:cxnSp>
+      <p:sp>
+        <p:nvSpPr>
+          <p:cNvPr id="24" name="Rounded Rectangle 23"/>
+          <p:cNvSpPr/>
+          <p:nvPr/>
+        </p:nvSpPr>
+        <p:spPr>
+          <a:xfrm>
+            <a:off x="847864" y="4849952"/>
+            <a:ext cx="1916913" cy="351200"/>
+          </a:xfrm>
+          <a:prstGeom prst="roundRect">
+            <a:avLst>
+              <a:gd name="adj" fmla="val 50000"/>
+            </a:avLst>
+          </a:prstGeom>
+          <a:solidFill>
+            <a:srgbClr val="E3EEF9"/>
+          </a:solidFill>
+          <a:ln w="15875">
+            <a:solidFill>
+              <a:srgbClr val="2F5597"/>
+            </a:solidFill>
+          </a:ln>
+          <a:effectLst/>
+        </p:spPr>
+        <p:style>
+          <a:lnRef idx="1">
+            <a:schemeClr val="accent1"/>
+          </a:lnRef>
+          <a:fillRef idx="3">
+            <a:schemeClr val="accent1"/>
+          </a:fillRef>
+          <a:effectRef idx="2">
+            <a:schemeClr val="accent1"/>
+          </a:effectRef>
+          <a:fontRef idx="minor">
+            <a:schemeClr val="lt1"/>
+          </a:fontRef>
+        </p:style>
+        <p:txBody>
+          <a:bodyPr rtlCol="0" anchor="ctr" wrap="none" lIns="64000" rIns="64000" tIns="25400" bIns="25400"/>
+          <a:lstStyle/>
+          <a:p>
+            <a:pPr algn="ctr"/>
+            <a:r>
+              <a:rPr sz="1300" b="0">
+                <a:solidFill>
+                  <a:srgbClr val="000000"/>
+                </a:solidFill>
+                <a:latin typeface="Calibri"/>
+              </a:rPr>
+              <a:t>cos²a = (1+cos2a)/2</a:t>
+            </a:r>
+          </a:p>
+        </p:txBody>
+      </p:sp>
+      <p:cxnSp>
+        <p:nvCxnSpPr>
+          <p:cNvPr id="25" name="Connector 24"/>
+          <p:cNvCxnSpPr/>
+          <p:nvPr/>
+        </p:nvCxnSpPr>
+        <p:spPr>
+          <a:xfrm flipH="1">
+            <a:off x="2764777" y="5238597"/>
+            <a:ext cx="1574111" cy="213045"/>
+          </a:xfrm>
+          <a:prstGeom prst="line">
+            <a:avLst/>
+          </a:prstGeom>
+          <a:ln w="15875">
+            <a:solidFill>
+              <a:srgbClr val="2F5597"/>
+            </a:solidFill>
+          </a:ln>
+        </p:spPr>
+        <p:style>
+          <a:lnRef idx="2">
+            <a:schemeClr val="accent1"/>
+          </a:lnRef>
+          <a:fillRef idx="0">
+            <a:schemeClr val="accent1"/>
+          </a:fillRef>
+          <a:effectRef idx="1">
+            <a:schemeClr val="accent1"/>
+          </a:effectRef>
+          <a:fontRef idx="minor">
+            <a:schemeClr val="tx1"/>
+          </a:fontRef>
+        </p:style>
+      </p:cxnSp>
+      <p:sp>
+        <p:nvSpPr>
+          <p:cNvPr id="26" name="Rounded Rectangle 25"/>
+          <p:cNvSpPr/>
+          <p:nvPr/>
+        </p:nvSpPr>
+        <p:spPr>
+          <a:xfrm>
+            <a:off x="847864" y="5276042"/>
+            <a:ext cx="1916913" cy="351200"/>
+          </a:xfrm>
+          <a:prstGeom prst="roundRect">
+            <a:avLst>
+              <a:gd name="adj" fmla="val 50000"/>
+            </a:avLst>
+          </a:prstGeom>
+          <a:solidFill>
+            <a:srgbClr val="E3EEF9"/>
+          </a:solidFill>
+          <a:ln w="15875">
+            <a:solidFill>
+              <a:srgbClr val="2F5597"/>
+            </a:solidFill>
+          </a:ln>
+          <a:effectLst/>
+        </p:spPr>
+        <p:style>
+          <a:lnRef idx="1">
+            <a:schemeClr val="accent1"/>
+          </a:lnRef>
+          <a:fillRef idx="3">
+            <a:schemeClr val="accent1"/>
+          </a:fillRef>
+          <a:effectRef idx="2">
+            <a:schemeClr val="accent1"/>
+          </a:effectRef>
+          <a:fontRef idx="minor">
+            <a:schemeClr val="lt1"/>
+          </a:fontRef>
+        </p:style>
+        <p:txBody>
+          <a:bodyPr rtlCol="0" anchor="ctr" wrap="none" lIns="64000" rIns="64000" tIns="25400" bIns="25400"/>
+          <a:lstStyle/>
+          <a:p>
+            <a:pPr algn="ctr"/>
+            <a:r>
+              <a:rPr sz="1300" b="0">
+                <a:solidFill>
+                  <a:srgbClr val="000000"/>
+                </a:solidFill>
+                <a:latin typeface="Calibri"/>
+              </a:rPr>
+              <a:t>sin²a = (1−cos2a)/2</a:t>
+            </a:r>
+          </a:p>
+        </p:txBody>
+      </p:sp>
+      <p:sp>
+        <p:nvSpPr>
+          <p:cNvPr id="27" name="Oval 26"/>
+          <p:cNvSpPr/>
+          <p:nvPr/>
+        </p:nvSpPr>
+        <p:spPr>
+          <a:xfrm>
+            <a:off x="3363922" y="4826713"/>
+            <a:ext cx="1949933" cy="823767"/>
+          </a:xfrm>
+          <a:prstGeom prst="ellipse">
+            <a:avLst/>
+          </a:prstGeom>
+          <a:solidFill>
+            <a:srgbClr val="E2EFDA"/>
+          </a:solidFill>
+          <a:ln w="31750">
+            <a:solidFill>
+              <a:srgbClr val="375623"/>
+            </a:solidFill>
+          </a:ln>
+          <a:effectLst/>
+        </p:spPr>
+        <p:style>
+          <a:lnRef idx="1">
+            <a:schemeClr val="accent1"/>
+          </a:lnRef>
+          <a:fillRef idx="3">
+            <a:schemeClr val="accent1"/>
+          </a:fillRef>
+          <a:effectRef idx="2">
+            <a:schemeClr val="accent1"/>
+          </a:effectRef>
+          <a:fontRef idx="minor">
+            <a:schemeClr val="lt1"/>
+          </a:fontRef>
+        </p:style>
+        <p:txBody>
+          <a:bodyPr rtlCol="0" anchor="ctr" wrap="none" lIns="64000" rIns="64000" tIns="25400" bIns="25400"/>
+          <a:lstStyle/>
+          <a:p>
+            <a:pPr algn="ctr"/>
+            <a:r>
+              <a:rPr sz="1500" b="1">
+                <a:solidFill>
+                  <a:srgbClr val="000000"/>
+                </a:solidFill>
+                <a:latin typeface="Calibri"/>
+              </a:rPr>
+              <a:t>Công thức hạ</a:t>
+            </a:r>
+          </a:p>
+          <a:p>
+            <a:pPr algn="ctr"/>
+            <a:r>
+              <a:rPr sz="1500" b="1">
+                <a:solidFill>
+                  <a:srgbClr val="000000"/>
+                </a:solidFill>
+                <a:latin typeface="Calibri"/>
+              </a:rPr>
+              <a:t>bậc</a:t>
+            </a:r>
+          </a:p>
+        </p:txBody>
+      </p:sp>
+      <p:cxnSp>
+        <p:nvCxnSpPr>
+          <p:cNvPr id="28" name="Connector 27"/>
+          <p:cNvCxnSpPr/>
+          <p:nvPr/>
+        </p:nvCxnSpPr>
+        <p:spPr>
+          <a:xfrm>
+            <a:off x="6027267" y="3954780"/>
+            <a:ext cx="1688379" cy="1283817"/>
+          </a:xfrm>
+          <a:prstGeom prst="line">
+            <a:avLst/>
+          </a:prstGeom>
+          <a:ln w="44450">
+            <a:solidFill>
+              <a:srgbClr val="7030A0"/>
+            </a:solidFill>
+          </a:ln>
+        </p:spPr>
+        <p:style>
+          <a:lnRef idx="2">
+            <a:schemeClr val="accent1"/>
+          </a:lnRef>
+          <a:fillRef idx="0">
+            <a:schemeClr val="accent1"/>
+          </a:fillRef>
+          <a:effectRef idx="1">
+            <a:schemeClr val="accent1"/>
+          </a:effectRef>
+          <a:fontRef idx="minor">
+            <a:schemeClr val="tx1"/>
+          </a:fontRef>
+        </p:style>
+      </p:cxnSp>
+      <p:cxnSp>
+        <p:nvCxnSpPr>
+          <p:cNvPr id="29" name="Connector 28"/>
+          <p:cNvCxnSpPr/>
+          <p:nvPr/>
+        </p:nvCxnSpPr>
+        <p:spPr>
+          <a:xfrm flipV="1">
+            <a:off x="7715646" y="4611085"/>
+            <a:ext cx="1659963" cy="627512"/>
+          </a:xfrm>
+          <a:prstGeom prst="line">
+            <a:avLst/>
+          </a:prstGeom>
+          <a:ln w="15875">
+            <a:solidFill>
+              <a:srgbClr val="7030A0"/>
+            </a:solidFill>
+          </a:ln>
+        </p:spPr>
+        <p:style>
+          <a:lnRef idx="2">
+            <a:schemeClr val="accent1"/>
+          </a:lnRef>
+          <a:fillRef idx="0">
+            <a:schemeClr val="accent1"/>
+          </a:fillRef>
+          <a:effectRef idx="1">
+            <a:schemeClr val="accent1"/>
+          </a:effectRef>
+          <a:fontRef idx="minor">
+            <a:schemeClr val="tx1"/>
+          </a:fontRef>
+        </p:style>
+      </p:cxnSp>
+      <p:sp>
+        <p:nvSpPr>
+          <p:cNvPr id="30" name="Rounded Rectangle 29"/>
+          <p:cNvSpPr/>
+          <p:nvPr/>
+        </p:nvSpPr>
+        <p:spPr>
+          <a:xfrm>
+            <a:off x="9375609" y="4334774"/>
+            <a:ext cx="1745209" cy="552622"/>
+          </a:xfrm>
+          <a:prstGeom prst="roundRect">
+            <a:avLst>
+              <a:gd name="adj" fmla="val 50000"/>
+            </a:avLst>
+          </a:prstGeom>
+          <a:solidFill>
+            <a:srgbClr val="F3E8F7"/>
+          </a:solidFill>
+          <a:ln w="15875">
+            <a:solidFill>
+              <a:srgbClr val="7030A0"/>
+            </a:solidFill>
+          </a:ln>
+          <a:effectLst/>
+        </p:spPr>
+        <p:style>
+          <a:lnRef idx="1">
+            <a:schemeClr val="accent1"/>
+          </a:lnRef>
+          <a:fillRef idx="3">
+            <a:schemeClr val="accent1"/>
+          </a:fillRef>
+          <a:effectRef idx="2">
+            <a:schemeClr val="accent1"/>
+          </a:effectRef>
+          <a:fontRef idx="minor">
+            <a:schemeClr val="lt1"/>
+          </a:fontRef>
+        </p:style>
+        <p:txBody>
+          <a:bodyPr rtlCol="0" anchor="ctr" wrap="none" lIns="64000" rIns="64000" tIns="25400" bIns="25400"/>
+          <a:lstStyle/>
+          <a:p>
+            <a:pPr algn="ctr"/>
+            <a:r>
+              <a:rPr sz="1300" b="0">
+                <a:solidFill>
+                  <a:srgbClr val="000000"/>
+                </a:solidFill>
+                <a:latin typeface="Calibri"/>
+              </a:rPr>
+              <a:t>2sinacosb =</a:t>
+            </a:r>
+          </a:p>
+          <a:p>
+            <a:pPr algn="ctr"/>
+            <a:r>
+              <a:rPr sz="1300" b="0">
+                <a:solidFill>
+                  <a:srgbClr val="000000"/>
+                </a:solidFill>
+                <a:latin typeface="Calibri"/>
+              </a:rPr>
+              <a:t>sin(a+b)+sin(a−b)</a:t>
+            </a:r>
+          </a:p>
+        </p:txBody>
+      </p:sp>
+      <p:cxnSp>
+        <p:nvCxnSpPr>
+          <p:cNvPr id="31" name="Connector 30"/>
+          <p:cNvCxnSpPr/>
+          <p:nvPr/>
+        </p:nvCxnSpPr>
+        <p:spPr>
+          <a:xfrm>
+            <a:off x="7715646" y="5238597"/>
+            <a:ext cx="1316555" cy="0"/>
+          </a:xfrm>
+          <a:prstGeom prst="line">
+            <a:avLst/>
+          </a:prstGeom>
+          <a:ln w="15875">
+            <a:solidFill>
+              <a:srgbClr val="7030A0"/>
+            </a:solidFill>
+          </a:ln>
+        </p:spPr>
+        <p:style>
+          <a:lnRef idx="2">
+            <a:schemeClr val="accent1"/>
+          </a:lnRef>
+          <a:fillRef idx="0">
+            <a:schemeClr val="accent1"/>
+          </a:fillRef>
+          <a:effectRef idx="1">
+            <a:schemeClr val="accent1"/>
+          </a:effectRef>
+          <a:fontRef idx="minor">
+            <a:schemeClr val="tx1"/>
+          </a:fontRef>
+        </p:style>
+      </p:cxnSp>
+      <p:sp>
+        <p:nvSpPr>
+          <p:cNvPr id="32" name="Rounded Rectangle 31"/>
+          <p:cNvSpPr/>
+          <p:nvPr/>
+        </p:nvSpPr>
+        <p:spPr>
+          <a:xfrm>
+            <a:off x="9032201" y="4962286"/>
+            <a:ext cx="2432025" cy="552622"/>
+          </a:xfrm>
+          <a:prstGeom prst="roundRect">
+            <a:avLst>
+              <a:gd name="adj" fmla="val 50000"/>
+            </a:avLst>
+          </a:prstGeom>
+          <a:solidFill>
+            <a:srgbClr val="F3E8F7"/>
+          </a:solidFill>
+          <a:ln w="15875">
+            <a:solidFill>
+              <a:srgbClr val="7030A0"/>
+            </a:solidFill>
+          </a:ln>
+          <a:effectLst/>
+        </p:spPr>
+        <p:style>
+          <a:lnRef idx="1">
+            <a:schemeClr val="accent1"/>
+          </a:lnRef>
+          <a:fillRef idx="3">
+            <a:schemeClr val="accent1"/>
+          </a:fillRef>
+          <a:effectRef idx="2">
+            <a:schemeClr val="accent1"/>
+          </a:effectRef>
+          <a:fontRef idx="minor">
+            <a:schemeClr val="lt1"/>
+          </a:fontRef>
+        </p:style>
+        <p:txBody>
+          <a:bodyPr rtlCol="0" anchor="ctr" wrap="none" lIns="64000" rIns="64000" tIns="25400" bIns="25400"/>
+          <a:lstStyle/>
+          <a:p>
+            <a:pPr algn="ctr"/>
+            <a:r>
+              <a:rPr sz="1300" b="0">
+                <a:solidFill>
+                  <a:srgbClr val="000000"/>
+                </a:solidFill>
+                <a:latin typeface="Calibri"/>
+              </a:rPr>
+              <a:t>sina+sinb =</a:t>
+            </a:r>
+          </a:p>
+          <a:p>
+            <a:pPr algn="ctr"/>
+            <a:r>
+              <a:rPr sz="1300" b="0">
+                <a:solidFill>
+                  <a:srgbClr val="000000"/>
+                </a:solidFill>
+                <a:latin typeface="Calibri"/>
+              </a:rPr>
+              <a:t>2sin((a+b)/2)cos((a−b)/2)</a:t>
+            </a:r>
+          </a:p>
+        </p:txBody>
+      </p:sp>
+      <p:cxnSp>
+        <p:nvCxnSpPr>
+          <p:cNvPr id="33" name="Connector 32"/>
+          <p:cNvCxnSpPr/>
+          <p:nvPr/>
+        </p:nvCxnSpPr>
+        <p:spPr>
+          <a:xfrm>
+            <a:off x="7715646" y="5238597"/>
+            <a:ext cx="1316555" cy="627512"/>
+          </a:xfrm>
+          <a:prstGeom prst="line">
+            <a:avLst/>
+          </a:prstGeom>
+          <a:ln w="15875">
+            <a:solidFill>
+              <a:srgbClr val="7030A0"/>
+            </a:solidFill>
+          </a:ln>
+        </p:spPr>
+        <p:style>
+          <a:lnRef idx="2">
+            <a:schemeClr val="accent1"/>
+          </a:lnRef>
+          <a:fillRef idx="0">
+            <a:schemeClr val="accent1"/>
+          </a:fillRef>
+          <a:effectRef idx="1">
+            <a:schemeClr val="accent1"/>
+          </a:effectRef>
+          <a:fontRef idx="minor">
+            <a:schemeClr val="tx1"/>
+          </a:fontRef>
+        </p:style>
+      </p:cxnSp>
+      <p:sp>
+        <p:nvSpPr>
+          <p:cNvPr id="34" name="Rounded Rectangle 33"/>
+          <p:cNvSpPr/>
+          <p:nvPr/>
+        </p:nvSpPr>
+        <p:spPr>
+          <a:xfrm>
+            <a:off x="9032201" y="5589798"/>
+            <a:ext cx="2432025" cy="552622"/>
+          </a:xfrm>
+          <a:prstGeom prst="roundRect">
+            <a:avLst>
+              <a:gd name="adj" fmla="val 50000"/>
+            </a:avLst>
+          </a:prstGeom>
+          <a:solidFill>
+            <a:srgbClr val="F3E8F7"/>
+          </a:solidFill>
+          <a:ln w="15875">
+            <a:solidFill>
+              <a:srgbClr val="7030A0"/>
+            </a:solidFill>
+          </a:ln>
+          <a:effectLst/>
+        </p:spPr>
+        <p:style>
+          <a:lnRef idx="1">
+            <a:schemeClr val="accent1"/>
+          </a:lnRef>
+          <a:fillRef idx="3">
+            <a:schemeClr val="accent1"/>
+          </a:fillRef>
+          <a:effectRef idx="2">
+            <a:schemeClr val="accent1"/>
+          </a:effectRef>
+          <a:fontRef idx="minor">
+            <a:schemeClr val="lt1"/>
+          </a:fontRef>
+        </p:style>
+        <p:txBody>
+          <a:bodyPr rtlCol="0" anchor="ctr" wrap="none" lIns="64000" rIns="64000" tIns="25400" bIns="25400"/>
+          <a:lstStyle/>
+          <a:p>
+            <a:pPr algn="ctr"/>
+            <a:r>
+              <a:rPr sz="1300" b="0">
+                <a:solidFill>
+                  <a:srgbClr val="000000"/>
+                </a:solidFill>
+                <a:latin typeface="Calibri"/>
+              </a:rPr>
+              <a:t>cosa+cosb =</a:t>
+            </a:r>
+          </a:p>
+          <a:p>
+            <a:pPr algn="ctr"/>
+            <a:r>
+              <a:rPr sz="1300" b="0">
+                <a:solidFill>
+                  <a:srgbClr val="000000"/>
+                </a:solidFill>
+                <a:latin typeface="Calibri"/>
+              </a:rPr>
+              <a:t>2cos((a+b)/2)cos((a−b)/2)</a:t>
+            </a:r>
+          </a:p>
+        </p:txBody>
+      </p:sp>
+      <p:sp>
+        <p:nvSpPr>
+          <p:cNvPr id="35" name="Oval 34"/>
+          <p:cNvSpPr/>
+          <p:nvPr/>
+        </p:nvSpPr>
+        <p:spPr>
+          <a:xfrm>
+            <a:off x="6810021" y="4826713"/>
+            <a:ext cx="1811249" cy="823767"/>
+          </a:xfrm>
+          <a:prstGeom prst="ellipse">
+            <a:avLst/>
+          </a:prstGeom>
+          <a:solidFill>
+            <a:srgbClr val="FFF2CC"/>
+          </a:solidFill>
+          <a:ln w="31750">
+            <a:solidFill>
+              <a:srgbClr val="BF8F00"/>
+            </a:solidFill>
+          </a:ln>
+          <a:effectLst/>
+        </p:spPr>
+        <p:style>
+          <a:lnRef idx="1">
+            <a:schemeClr val="accent1"/>
+          </a:lnRef>
+          <a:fillRef idx="3">
+            <a:schemeClr val="accent1"/>
+          </a:fillRef>
+          <a:effectRef idx="2">
+            <a:schemeClr val="accent1"/>
+          </a:effectRef>
+          <a:fontRef idx="minor">
+            <a:schemeClr val="lt1"/>
+          </a:fontRef>
+        </p:style>
+        <p:txBody>
+          <a:bodyPr rtlCol="0" anchor="ctr" wrap="none" lIns="64000" rIns="64000" tIns="25400" bIns="25400"/>
+          <a:lstStyle/>
+          <a:p>
+            <a:pPr algn="ctr"/>
+            <a:r>
+              <a:rPr sz="1500" b="1">
+                <a:solidFill>
+                  <a:srgbClr val="000000"/>
+                </a:solidFill>
+                <a:latin typeface="Calibri"/>
+              </a:rPr>
+              <a:t>Tích → Tổng</a:t>
+            </a:r>
+          </a:p>
+          <a:p>
+            <a:pPr algn="ctr"/>
+            <a:r>
+              <a:rPr sz="1500" b="1">
+                <a:solidFill>
+                  <a:srgbClr val="000000"/>
+                </a:solidFill>
+                <a:latin typeface="Calibri"/>
+              </a:rPr>
+              <a:t>Tổng → Tích</a:t>
+            </a:r>
+          </a:p>
+        </p:txBody>
+      </p:sp>
+      <p:sp>
+        <p:nvSpPr>
+          <p:cNvPr id="36" name="Oval 35"/>
+          <p:cNvSpPr/>
+          <p:nvPr/>
+        </p:nvSpPr>
+        <p:spPr>
+          <a:xfrm>
+            <a:off x="4705590" y="3484793"/>
+            <a:ext cx="2643353" cy="939972"/>
+          </a:xfrm>
+          <a:prstGeom prst="ellipse">
+            <a:avLst/>
+          </a:prstGeom>
+          <a:solidFill>
+            <a:srgbClr val="002060"/>
+          </a:solidFill>
+          <a:ln w="25400">
+            <a:solidFill>
+              <a:srgbClr val="000B1E"/>
+            </a:solidFill>
+          </a:ln>
+          <a:effectLst/>
+        </p:spPr>
+        <p:style>
+          <a:lnRef idx="1">
+            <a:schemeClr val="accent1"/>
+          </a:lnRef>
+          <a:fillRef idx="3">
+            <a:schemeClr val="accent1"/>
+          </a:fillRef>
+          <a:effectRef idx="2">
+            <a:schemeClr val="accent1"/>
+          </a:effectRef>
+          <a:fontRef idx="minor">
+            <a:schemeClr val="lt1"/>
+          </a:fontRef>
+        </p:style>
+        <p:txBody>
+          <a:bodyPr rtlCol="0" anchor="ctr" wrap="none" lIns="64000" rIns="64000" tIns="25400" bIns="25400"/>
+          <a:lstStyle/>
+          <a:p>
+            <a:pPr algn="ctr"/>
+            <a:r>
+              <a:rPr sz="1700" b="1">
+                <a:solidFill>
+                  <a:srgbClr val="FFFFFF"/>
+                </a:solidFill>
+                <a:latin typeface="Calibri"/>
+              </a:rPr>
+              <a:t>CÔNG THỨC LƯỢNG</a:t>
+            </a:r>
+          </a:p>
+          <a:p>
+            <a:pPr algn="ctr"/>
+            <a:r>
+              <a:rPr sz="1700" b="1">
+                <a:solidFill>
+                  <a:srgbClr val="FFFFFF"/>
+                </a:solidFill>
+                <a:latin typeface="Calibri"/>
+              </a:rPr>
+              <a:t>GIÁC</a:t>
+            </a:r>
+          </a:p>
+        </p:txBody>
+      </p:sp>
     </p:spTree>
   </p:cSld>
   <p:clrMapOvr>
